--- a/Japan/Progress/Presentation 5.1 (IAD).pptx
+++ b/Japan/Progress/Presentation 5.1 (IAD).pptx
@@ -5,7 +5,7 @@
     <p:sldMasterId id="2147483648" r:id="rId1"/>
   </p:sldMasterIdLst>
   <p:notesMasterIdLst>
-    <p:notesMasterId r:id="rId8"/>
+    <p:notesMasterId r:id="rId9"/>
   </p:notesMasterIdLst>
   <p:sldIdLst>
     <p:sldId id="256" r:id="rId2"/>
@@ -13,19 +13,20 @@
     <p:sldId id="841" r:id="rId4"/>
     <p:sldId id="840" r:id="rId5"/>
     <p:sldId id="842" r:id="rId6"/>
-    <p:sldId id="267" r:id="rId7"/>
+    <p:sldId id="844" r:id="rId7"/>
+    <p:sldId id="267" r:id="rId8"/>
   </p:sldIdLst>
   <p:sldSz cx="18288000" cy="10287000"/>
   <p:notesSz cx="6858000" cy="9144000"/>
   <p:embeddedFontLst>
     <p:embeddedFont>
       <p:font typeface="DM Serif Display" pitchFamily="2" charset="0"/>
-      <p:regular r:id="rId9"/>
-      <p:italic r:id="rId10"/>
+      <p:regular r:id="rId10"/>
+      <p:italic r:id="rId11"/>
     </p:embeddedFont>
     <p:embeddedFont>
       <p:font typeface="Open Sauce" panose="020B0604020202020204" charset="0"/>
-      <p:regular r:id="rId11"/>
+      <p:regular r:id="rId12"/>
     </p:embeddedFont>
   </p:embeddedFontLst>
   <p:defaultTextStyle>
@@ -224,7 +225,7 @@
           <a:p>
             <a:fld id="{4E2EF82B-E016-44BD-B0C4-D5A3DF34FAF9}" type="datetimeFigureOut">
               <a:rPr lang="en-US" smtClean="0"/>
-              <a:t>10/28/2025</a:t>
+              <a:t>10/29/2025</a:t>
             </a:fld>
             <a:endParaRPr lang="en-US"/>
           </a:p>
@@ -671,7 +672,7 @@
             <a:fld id="{1D8BD707-D9CF-40AE-B4C6-C98DA3205C09}" type="datetimeFigureOut">
               <a:rPr lang="en-US" smtClean="0"/>
               <a:pPr/>
-              <a:t>10/28/2025</a:t>
+              <a:t>10/29/2025</a:t>
             </a:fld>
             <a:endParaRPr lang="en-US"/>
           </a:p>
@@ -836,7 +837,7 @@
             <a:fld id="{1D8BD707-D9CF-40AE-B4C6-C98DA3205C09}" type="datetimeFigureOut">
               <a:rPr lang="en-US" smtClean="0"/>
               <a:pPr/>
-              <a:t>10/28/2025</a:t>
+              <a:t>10/29/2025</a:t>
             </a:fld>
             <a:endParaRPr lang="en-US"/>
           </a:p>
@@ -1011,7 +1012,7 @@
             <a:fld id="{1D8BD707-D9CF-40AE-B4C6-C98DA3205C09}" type="datetimeFigureOut">
               <a:rPr lang="en-US" smtClean="0"/>
               <a:pPr/>
-              <a:t>10/28/2025</a:t>
+              <a:t>10/29/2025</a:t>
             </a:fld>
             <a:endParaRPr lang="en-US"/>
           </a:p>
@@ -1176,7 +1177,7 @@
             <a:fld id="{1D8BD707-D9CF-40AE-B4C6-C98DA3205C09}" type="datetimeFigureOut">
               <a:rPr lang="en-US" smtClean="0"/>
               <a:pPr/>
-              <a:t>10/28/2025</a:t>
+              <a:t>10/29/2025</a:t>
             </a:fld>
             <a:endParaRPr lang="en-US"/>
           </a:p>
@@ -1418,7 +1419,7 @@
             <a:fld id="{1D8BD707-D9CF-40AE-B4C6-C98DA3205C09}" type="datetimeFigureOut">
               <a:rPr lang="en-US" smtClean="0"/>
               <a:pPr/>
-              <a:t>10/28/2025</a:t>
+              <a:t>10/29/2025</a:t>
             </a:fld>
             <a:endParaRPr lang="en-US"/>
           </a:p>
@@ -1700,7 +1701,7 @@
             <a:fld id="{1D8BD707-D9CF-40AE-B4C6-C98DA3205C09}" type="datetimeFigureOut">
               <a:rPr lang="en-US" smtClean="0"/>
               <a:pPr/>
-              <a:t>10/28/2025</a:t>
+              <a:t>10/29/2025</a:t>
             </a:fld>
             <a:endParaRPr lang="en-US"/>
           </a:p>
@@ -2116,7 +2117,7 @@
             <a:fld id="{1D8BD707-D9CF-40AE-B4C6-C98DA3205C09}" type="datetimeFigureOut">
               <a:rPr lang="en-US" smtClean="0"/>
               <a:pPr/>
-              <a:t>10/28/2025</a:t>
+              <a:t>10/29/2025</a:t>
             </a:fld>
             <a:endParaRPr lang="en-US"/>
           </a:p>
@@ -2230,7 +2231,7 @@
             <a:fld id="{1D8BD707-D9CF-40AE-B4C6-C98DA3205C09}" type="datetimeFigureOut">
               <a:rPr lang="en-US" smtClean="0"/>
               <a:pPr/>
-              <a:t>10/28/2025</a:t>
+              <a:t>10/29/2025</a:t>
             </a:fld>
             <a:endParaRPr lang="en-US"/>
           </a:p>
@@ -2322,7 +2323,7 @@
             <a:fld id="{1D8BD707-D9CF-40AE-B4C6-C98DA3205C09}" type="datetimeFigureOut">
               <a:rPr lang="en-US" smtClean="0"/>
               <a:pPr/>
-              <a:t>10/28/2025</a:t>
+              <a:t>10/29/2025</a:t>
             </a:fld>
             <a:endParaRPr lang="en-US"/>
           </a:p>
@@ -2594,7 +2595,7 @@
             <a:fld id="{1D8BD707-D9CF-40AE-B4C6-C98DA3205C09}" type="datetimeFigureOut">
               <a:rPr lang="en-US" smtClean="0"/>
               <a:pPr/>
-              <a:t>10/28/2025</a:t>
+              <a:t>10/29/2025</a:t>
             </a:fld>
             <a:endParaRPr lang="en-US"/>
           </a:p>
@@ -2843,7 +2844,7 @@
             <a:fld id="{1D8BD707-D9CF-40AE-B4C6-C98DA3205C09}" type="datetimeFigureOut">
               <a:rPr lang="en-US" smtClean="0"/>
               <a:pPr/>
-              <a:t>10/28/2025</a:t>
+              <a:t>10/29/2025</a:t>
             </a:fld>
             <a:endParaRPr lang="en-US"/>
           </a:p>
@@ -3051,7 +3052,7 @@
             <a:fld id="{1D8BD707-D9CF-40AE-B4C6-C98DA3205C09}" type="datetimeFigureOut">
               <a:rPr lang="en-US" smtClean="0"/>
               <a:pPr/>
-              <a:t>10/28/2025</a:t>
+              <a:t>10/29/2025</a:t>
             </a:fld>
             <a:endParaRPr lang="en-US"/>
           </a:p>
@@ -4881,6 +4882,2168 @@
 </file>
 
 <file path=ppt/slides/slide6.xml><?xml version="1.0" encoding="utf-8"?>
+<p:sld xmlns:a="http://schemas.openxmlformats.org/drawingml/2006/main" xmlns:r="http://schemas.openxmlformats.org/officeDocument/2006/relationships" xmlns:p="http://schemas.openxmlformats.org/presentationml/2006/main">
+  <p:cSld>
+    <p:spTree>
+      <p:nvGrpSpPr>
+        <p:cNvPr id="1" name="">
+          <a:extLst>
+            <a:ext uri="{FF2B5EF4-FFF2-40B4-BE49-F238E27FC236}">
+              <a16:creationId xmlns:a16="http://schemas.microsoft.com/office/drawing/2014/main" id="{FC8B00B2-E8B4-C60D-729E-B8CAE0427C76}"/>
+            </a:ext>
+          </a:extLst>
+        </p:cNvPr>
+        <p:cNvGrpSpPr/>
+        <p:nvPr/>
+      </p:nvGrpSpPr>
+      <p:grpSpPr>
+        <a:xfrm>
+          <a:off x="0" y="0"/>
+          <a:ext cx="0" cy="0"/>
+          <a:chOff x="0" y="0"/>
+          <a:chExt cx="0" cy="0"/>
+        </a:xfrm>
+      </p:grpSpPr>
+      <p:sp>
+        <p:nvSpPr>
+          <p:cNvPr id="2" name="Freeform 2">
+            <a:extLst>
+              <a:ext uri="{FF2B5EF4-FFF2-40B4-BE49-F238E27FC236}">
+                <a16:creationId xmlns:a16="http://schemas.microsoft.com/office/drawing/2014/main" id="{7A87D438-DCF6-72B8-29F7-32984B3E0D41}"/>
+              </a:ext>
+            </a:extLst>
+          </p:cNvPr>
+          <p:cNvSpPr/>
+          <p:nvPr/>
+        </p:nvSpPr>
+        <p:spPr>
+          <a:xfrm>
+            <a:off x="0" y="0"/>
+            <a:ext cx="18288000" cy="10287000"/>
+          </a:xfrm>
+          <a:custGeom>
+            <a:avLst/>
+            <a:gdLst/>
+            <a:ahLst/>
+            <a:cxnLst/>
+            <a:rect l="l" t="t" r="r" b="b"/>
+            <a:pathLst>
+              <a:path w="18288000" h="10287000">
+                <a:moveTo>
+                  <a:pt x="0" y="0"/>
+                </a:moveTo>
+                <a:lnTo>
+                  <a:pt x="18288000" y="0"/>
+                </a:lnTo>
+                <a:lnTo>
+                  <a:pt x="18288000" y="10287000"/>
+                </a:lnTo>
+                <a:lnTo>
+                  <a:pt x="0" y="10287000"/>
+                </a:lnTo>
+                <a:lnTo>
+                  <a:pt x="0" y="0"/>
+                </a:lnTo>
+                <a:close/>
+              </a:path>
+            </a:pathLst>
+          </a:custGeom>
+          <a:blipFill>
+            <a:blip r:embed="rId2">
+              <a:alphaModFix amt="50000"/>
+            </a:blip>
+            <a:stretch>
+              <a:fillRect/>
+            </a:stretch>
+          </a:blipFill>
+          <a:ln cap="sq">
+            <a:noFill/>
+            <a:prstDash val="solid"/>
+            <a:miter/>
+          </a:ln>
+        </p:spPr>
+        <p:txBody>
+          <a:bodyPr/>
+          <a:lstStyle/>
+          <a:p>
+            <a:endParaRPr lang="en-US" dirty="0"/>
+          </a:p>
+        </p:txBody>
+      </p:sp>
+      <p:sp>
+        <p:nvSpPr>
+          <p:cNvPr id="3" name="AutoShape 3">
+            <a:extLst>
+              <a:ext uri="{FF2B5EF4-FFF2-40B4-BE49-F238E27FC236}">
+                <a16:creationId xmlns:a16="http://schemas.microsoft.com/office/drawing/2014/main" id="{AAA79B84-ABA2-8F75-C3D2-5280B6D63068}"/>
+              </a:ext>
+            </a:extLst>
+          </p:cNvPr>
+          <p:cNvSpPr/>
+          <p:nvPr/>
+        </p:nvSpPr>
+        <p:spPr>
+          <a:xfrm>
+            <a:off x="1166399" y="1028700"/>
+            <a:ext cx="687324" cy="0"/>
+          </a:xfrm>
+          <a:prstGeom prst="line">
+            <a:avLst/>
+          </a:prstGeom>
+          <a:ln w="76200" cap="flat">
+            <a:solidFill>
+              <a:srgbClr val="000000"/>
+            </a:solidFill>
+            <a:prstDash val="solid"/>
+            <a:headEnd type="none" w="sm" len="sm"/>
+            <a:tailEnd type="none" w="sm" len="sm"/>
+          </a:ln>
+        </p:spPr>
+        <p:txBody>
+          <a:bodyPr/>
+          <a:lstStyle/>
+          <a:p>
+            <a:endParaRPr lang="en-US" dirty="0"/>
+          </a:p>
+        </p:txBody>
+      </p:sp>
+      <p:sp>
+        <p:nvSpPr>
+          <p:cNvPr id="4" name="TextBox 8">
+            <a:extLst>
+              <a:ext uri="{FF2B5EF4-FFF2-40B4-BE49-F238E27FC236}">
+                <a16:creationId xmlns:a16="http://schemas.microsoft.com/office/drawing/2014/main" id="{31032B2C-3EB7-375F-E40E-7A2F093CF553}"/>
+              </a:ext>
+            </a:extLst>
+          </p:cNvPr>
+          <p:cNvSpPr txBox="1"/>
+          <p:nvPr/>
+        </p:nvSpPr>
+        <p:spPr>
+          <a:xfrm>
+            <a:off x="6727031" y="1409700"/>
+            <a:ext cx="4833938" cy="613181"/>
+          </a:xfrm>
+          <a:prstGeom prst="rect">
+            <a:avLst/>
+          </a:prstGeom>
+        </p:spPr>
+        <p:txBody>
+          <a:bodyPr wrap="square" lIns="0" tIns="0" rIns="0" bIns="0" rtlCol="0" anchor="t">
+            <a:spAutoFit/>
+          </a:bodyPr>
+          <a:lstStyle/>
+          <a:p>
+            <a:pPr marL="302259" lvl="1" algn="l">
+              <a:lnSpc>
+                <a:spcPts val="4479"/>
+              </a:lnSpc>
+            </a:pPr>
+            <a:r>
+              <a:rPr lang="en-US" sz="6000" b="1" dirty="0">
+                <a:solidFill>
+                  <a:srgbClr val="000000"/>
+                </a:solidFill>
+                <a:latin typeface="Times New Roman" panose="02020603050405020304" pitchFamily="18" charset="0"/>
+                <a:ea typeface="Open Sauce"/>
+                <a:cs typeface="Times New Roman" panose="02020603050405020304" pitchFamily="18" charset="0"/>
+                <a:sym typeface="Open Sauce"/>
+              </a:rPr>
+              <a:t>Required List</a:t>
+            </a:r>
+          </a:p>
+        </p:txBody>
+      </p:sp>
+      <p:graphicFrame>
+        <p:nvGraphicFramePr>
+          <p:cNvPr id="5" name="Table 4">
+            <a:extLst>
+              <a:ext uri="{FF2B5EF4-FFF2-40B4-BE49-F238E27FC236}">
+                <a16:creationId xmlns:a16="http://schemas.microsoft.com/office/drawing/2014/main" id="{0CC72307-7ABF-8F75-E403-C2726CA19E55}"/>
+              </a:ext>
+            </a:extLst>
+          </p:cNvPr>
+          <p:cNvGraphicFramePr>
+            <a:graphicFrameLocks noGrp="1"/>
+          </p:cNvGraphicFramePr>
+          <p:nvPr>
+            <p:extLst>
+              <p:ext uri="{D42A27DB-BD31-4B8C-83A1-F6EECF244321}">
+                <p14:modId xmlns:p14="http://schemas.microsoft.com/office/powerpoint/2010/main" val="4258871656"/>
+              </p:ext>
+            </p:extLst>
+          </p:nvPr>
+        </p:nvGraphicFramePr>
+        <p:xfrm>
+          <a:off x="1182811" y="2705100"/>
+          <a:ext cx="15685501" cy="7452360"/>
+        </p:xfrm>
+        <a:graphic>
+          <a:graphicData uri="http://schemas.openxmlformats.org/drawingml/2006/table">
+            <a:tbl>
+              <a:tblPr firstRow="1" bandRow="1">
+                <a:tableStyleId>{5C22544A-7EE6-4342-B048-85BDC9FD1C3A}</a:tableStyleId>
+              </a:tblPr>
+              <a:tblGrid>
+                <a:gridCol w="12352332">
+                  <a:extLst>
+                    <a:ext uri="{9D8B030D-6E8A-4147-A177-3AD203B41FA5}">
+                      <a16:colId xmlns:a16="http://schemas.microsoft.com/office/drawing/2014/main" val="1669542638"/>
+                    </a:ext>
+                  </a:extLst>
+                </a:gridCol>
+                <a:gridCol w="3333169">
+                  <a:extLst>
+                    <a:ext uri="{9D8B030D-6E8A-4147-A177-3AD203B41FA5}">
+                      <a16:colId xmlns:a16="http://schemas.microsoft.com/office/drawing/2014/main" val="2755673439"/>
+                    </a:ext>
+                  </a:extLst>
+                </a:gridCol>
+              </a:tblGrid>
+              <a:tr h="370840">
+                <a:tc>
+                  <a:txBody>
+                    <a:bodyPr/>
+                    <a:lstStyle/>
+                    <a:p>
+                      <a:pPr algn="ctr"/>
+                      <a:r>
+                        <a:rPr lang="en-US" sz="3000" b="1" dirty="0">
+                          <a:solidFill>
+                            <a:schemeClr val="tx1"/>
+                          </a:solidFill>
+                        </a:rPr>
+                        <a:t>NAME</a:t>
+                      </a:r>
+                    </a:p>
+                  </a:txBody>
+                  <a:tcPr>
+                    <a:lnL w="12700" cap="flat" cmpd="sng" algn="ctr">
+                      <a:solidFill>
+                        <a:schemeClr val="tx1"/>
+                      </a:solidFill>
+                      <a:prstDash val="solid"/>
+                      <a:round/>
+                      <a:headEnd type="none" w="med" len="med"/>
+                      <a:tailEnd type="none" w="med" len="med"/>
+                    </a:lnL>
+                    <a:lnR w="12700" cap="flat" cmpd="sng" algn="ctr">
+                      <a:solidFill>
+                        <a:schemeClr val="tx1"/>
+                      </a:solidFill>
+                      <a:prstDash val="solid"/>
+                      <a:round/>
+                      <a:headEnd type="none" w="med" len="med"/>
+                      <a:tailEnd type="none" w="med" len="med"/>
+                    </a:lnR>
+                    <a:lnT w="12700" cap="flat" cmpd="sng" algn="ctr">
+                      <a:solidFill>
+                        <a:schemeClr val="tx1"/>
+                      </a:solidFill>
+                      <a:prstDash val="solid"/>
+                      <a:round/>
+                      <a:headEnd type="none" w="med" len="med"/>
+                      <a:tailEnd type="none" w="med" len="med"/>
+                    </a:lnT>
+                    <a:lnB w="12700" cap="flat" cmpd="sng" algn="ctr">
+                      <a:solidFill>
+                        <a:schemeClr val="tx1"/>
+                      </a:solidFill>
+                      <a:prstDash val="solid"/>
+                      <a:round/>
+                      <a:headEnd type="none" w="med" len="med"/>
+                      <a:tailEnd type="none" w="med" len="med"/>
+                    </a:lnB>
+                    <a:noFill/>
+                  </a:tcPr>
+                </a:tc>
+                <a:tc>
+                  <a:txBody>
+                    <a:bodyPr/>
+                    <a:lstStyle/>
+                    <a:p>
+                      <a:pPr algn="ctr"/>
+                      <a:r>
+                        <a:rPr lang="en-US" sz="3000" dirty="0">
+                          <a:solidFill>
+                            <a:schemeClr val="tx1"/>
+                          </a:solidFill>
+                        </a:rPr>
+                        <a:t>PRICE</a:t>
+                      </a:r>
+                    </a:p>
+                  </a:txBody>
+                  <a:tcPr>
+                    <a:lnL w="12700" cap="flat" cmpd="sng" algn="ctr">
+                      <a:solidFill>
+                        <a:schemeClr val="tx1"/>
+                      </a:solidFill>
+                      <a:prstDash val="solid"/>
+                      <a:round/>
+                      <a:headEnd type="none" w="med" len="med"/>
+                      <a:tailEnd type="none" w="med" len="med"/>
+                    </a:lnL>
+                    <a:lnR w="12700" cap="flat" cmpd="sng" algn="ctr">
+                      <a:solidFill>
+                        <a:schemeClr val="tx1"/>
+                      </a:solidFill>
+                      <a:prstDash val="solid"/>
+                      <a:round/>
+                      <a:headEnd type="none" w="med" len="med"/>
+                      <a:tailEnd type="none" w="med" len="med"/>
+                    </a:lnR>
+                    <a:lnT w="12700" cap="flat" cmpd="sng" algn="ctr">
+                      <a:solidFill>
+                        <a:schemeClr val="tx1"/>
+                      </a:solidFill>
+                      <a:prstDash val="solid"/>
+                      <a:round/>
+                      <a:headEnd type="none" w="med" len="med"/>
+                      <a:tailEnd type="none" w="med" len="med"/>
+                    </a:lnT>
+                    <a:lnB w="12700" cap="flat" cmpd="sng" algn="ctr">
+                      <a:solidFill>
+                        <a:schemeClr val="tx1"/>
+                      </a:solidFill>
+                      <a:prstDash val="solid"/>
+                      <a:round/>
+                      <a:headEnd type="none" w="med" len="med"/>
+                      <a:tailEnd type="none" w="med" len="med"/>
+                    </a:lnB>
+                    <a:noFill/>
+                  </a:tcPr>
+                </a:tc>
+                <a:extLst>
+                  <a:ext uri="{0D108BD9-81ED-4DB2-BD59-A6C34878D82A}">
+                    <a16:rowId xmlns:a16="http://schemas.microsoft.com/office/drawing/2014/main" val="1014492221"/>
+                  </a:ext>
+                </a:extLst>
+              </a:tr>
+              <a:tr h="370840">
+                <a:tc>
+                  <a:txBody>
+                    <a:bodyPr/>
+                    <a:lstStyle/>
+                    <a:p>
+                      <a:pPr marL="0" marR="0" lvl="0" indent="0" algn="ctr" defTabSz="914400" rtl="0" eaLnBrk="1" fontAlgn="auto" latinLnBrk="0" hangingPunct="1">
+                        <a:lnSpc>
+                          <a:spcPct val="100000"/>
+                        </a:lnSpc>
+                        <a:spcBef>
+                          <a:spcPts val="0"/>
+                        </a:spcBef>
+                        <a:spcAft>
+                          <a:spcPts val="0"/>
+                        </a:spcAft>
+                        <a:buClrTx/>
+                        <a:buSzTx/>
+                        <a:buFontTx/>
+                        <a:buNone/>
+                        <a:tabLst/>
+                        <a:defRPr/>
+                      </a:pPr>
+                      <a:r>
+                        <a:rPr lang="en-US" sz="2500" b="0" kern="1200" dirty="0">
+                          <a:solidFill>
+                            <a:schemeClr val="tx1"/>
+                          </a:solidFill>
+                          <a:latin typeface="+mn-lt"/>
+                          <a:ea typeface="+mn-ea"/>
+                          <a:cs typeface="+mn-cs"/>
+                        </a:rPr>
+                        <a:t>2-inch General-purpose Integrating Sphere [NIS-002-03A]</a:t>
+                      </a:r>
+                    </a:p>
+                  </a:txBody>
+                  <a:tcPr>
+                    <a:lnL w="12700" cap="flat" cmpd="sng" algn="ctr">
+                      <a:solidFill>
+                        <a:schemeClr val="tx1"/>
+                      </a:solidFill>
+                      <a:prstDash val="solid"/>
+                      <a:round/>
+                      <a:headEnd type="none" w="med" len="med"/>
+                      <a:tailEnd type="none" w="med" len="med"/>
+                    </a:lnL>
+                    <a:lnR w="12700" cap="flat" cmpd="sng" algn="ctr">
+                      <a:solidFill>
+                        <a:schemeClr val="tx1"/>
+                      </a:solidFill>
+                      <a:prstDash val="solid"/>
+                      <a:round/>
+                      <a:headEnd type="none" w="med" len="med"/>
+                      <a:tailEnd type="none" w="med" len="med"/>
+                    </a:lnR>
+                    <a:lnT w="12700" cap="flat" cmpd="sng" algn="ctr">
+                      <a:solidFill>
+                        <a:schemeClr val="tx1"/>
+                      </a:solidFill>
+                      <a:prstDash val="solid"/>
+                      <a:round/>
+                      <a:headEnd type="none" w="med" len="med"/>
+                      <a:tailEnd type="none" w="med" len="med"/>
+                    </a:lnT>
+                    <a:lnB w="12700" cap="flat" cmpd="sng" algn="ctr">
+                      <a:solidFill>
+                        <a:schemeClr val="tx1"/>
+                      </a:solidFill>
+                      <a:prstDash val="solid"/>
+                      <a:round/>
+                      <a:headEnd type="none" w="med" len="med"/>
+                      <a:tailEnd type="none" w="med" len="med"/>
+                    </a:lnB>
+                    <a:noFill/>
+                  </a:tcPr>
+                </a:tc>
+                <a:tc>
+                  <a:txBody>
+                    <a:bodyPr/>
+                    <a:lstStyle/>
+                    <a:p>
+                      <a:pPr algn="ctr"/>
+                      <a:r>
+                        <a:rPr lang="en-US" sz="2500" b="0" i="0" kern="1200" dirty="0">
+                          <a:solidFill>
+                            <a:schemeClr val="dk1"/>
+                          </a:solidFill>
+                          <a:effectLst/>
+                          <a:latin typeface="+mn-lt"/>
+                          <a:ea typeface="+mn-ea"/>
+                          <a:cs typeface="+mn-cs"/>
+                        </a:rPr>
+                        <a:t>140,000 Yen</a:t>
+                      </a:r>
+                    </a:p>
+                  </a:txBody>
+                  <a:tcPr>
+                    <a:lnL w="12700" cap="flat" cmpd="sng" algn="ctr">
+                      <a:solidFill>
+                        <a:schemeClr val="tx1"/>
+                      </a:solidFill>
+                      <a:prstDash val="solid"/>
+                      <a:round/>
+                      <a:headEnd type="none" w="med" len="med"/>
+                      <a:tailEnd type="none" w="med" len="med"/>
+                    </a:lnL>
+                    <a:lnR w="12700" cap="flat" cmpd="sng" algn="ctr">
+                      <a:solidFill>
+                        <a:schemeClr val="tx1"/>
+                      </a:solidFill>
+                      <a:prstDash val="solid"/>
+                      <a:round/>
+                      <a:headEnd type="none" w="med" len="med"/>
+                      <a:tailEnd type="none" w="med" len="med"/>
+                    </a:lnR>
+                    <a:lnT w="12700" cap="flat" cmpd="sng" algn="ctr">
+                      <a:solidFill>
+                        <a:schemeClr val="tx1"/>
+                      </a:solidFill>
+                      <a:prstDash val="solid"/>
+                      <a:round/>
+                      <a:headEnd type="none" w="med" len="med"/>
+                      <a:tailEnd type="none" w="med" len="med"/>
+                    </a:lnT>
+                    <a:lnB w="12700" cap="flat" cmpd="sng" algn="ctr">
+                      <a:solidFill>
+                        <a:schemeClr val="tx1"/>
+                      </a:solidFill>
+                      <a:prstDash val="solid"/>
+                      <a:round/>
+                      <a:headEnd type="none" w="med" len="med"/>
+                      <a:tailEnd type="none" w="med" len="med"/>
+                    </a:lnB>
+                    <a:noFill/>
+                  </a:tcPr>
+                </a:tc>
+                <a:extLst>
+                  <a:ext uri="{0D108BD9-81ED-4DB2-BD59-A6C34878D82A}">
+                    <a16:rowId xmlns:a16="http://schemas.microsoft.com/office/drawing/2014/main" val="2271078042"/>
+                  </a:ext>
+                </a:extLst>
+              </a:tr>
+              <a:tr h="370840">
+                <a:tc>
+                  <a:txBody>
+                    <a:bodyPr/>
+                    <a:lstStyle/>
+                    <a:p>
+                      <a:pPr marL="0" marR="0" lvl="0" indent="0" algn="ctr" defTabSz="914400" rtl="0" eaLnBrk="1" fontAlgn="auto" latinLnBrk="0" hangingPunct="1">
+                        <a:lnSpc>
+                          <a:spcPct val="100000"/>
+                        </a:lnSpc>
+                        <a:spcBef>
+                          <a:spcPts val="0"/>
+                        </a:spcBef>
+                        <a:spcAft>
+                          <a:spcPts val="0"/>
+                        </a:spcAft>
+                        <a:buClrTx/>
+                        <a:buSzTx/>
+                        <a:buFontTx/>
+                        <a:buNone/>
+                        <a:tabLst/>
+                        <a:defRPr/>
+                      </a:pPr>
+                      <a:r>
+                        <a:rPr lang="en-US" sz="2500" b="0" kern="1200" dirty="0">
+                          <a:solidFill>
+                            <a:schemeClr val="tx1"/>
+                          </a:solidFill>
+                          <a:latin typeface="+mn-lt"/>
+                          <a:ea typeface="+mn-ea"/>
+                          <a:cs typeface="+mn-cs"/>
+                        </a:rPr>
+                        <a:t>Sphere cover for laser mount</a:t>
+                      </a:r>
+                    </a:p>
+                  </a:txBody>
+                  <a:tcPr>
+                    <a:lnL w="12700" cap="flat" cmpd="sng" algn="ctr">
+                      <a:solidFill>
+                        <a:schemeClr val="tx1"/>
+                      </a:solidFill>
+                      <a:prstDash val="solid"/>
+                      <a:round/>
+                      <a:headEnd type="none" w="med" len="med"/>
+                      <a:tailEnd type="none" w="med" len="med"/>
+                    </a:lnL>
+                    <a:lnR w="12700" cap="flat" cmpd="sng" algn="ctr">
+                      <a:solidFill>
+                        <a:schemeClr val="tx1"/>
+                      </a:solidFill>
+                      <a:prstDash val="solid"/>
+                      <a:round/>
+                      <a:headEnd type="none" w="med" len="med"/>
+                      <a:tailEnd type="none" w="med" len="med"/>
+                    </a:lnR>
+                    <a:lnT w="12700" cap="flat" cmpd="sng" algn="ctr">
+                      <a:solidFill>
+                        <a:schemeClr val="tx1"/>
+                      </a:solidFill>
+                      <a:prstDash val="solid"/>
+                      <a:round/>
+                      <a:headEnd type="none" w="med" len="med"/>
+                      <a:tailEnd type="none" w="med" len="med"/>
+                    </a:lnT>
+                    <a:lnB w="12700" cap="flat" cmpd="sng" algn="ctr">
+                      <a:solidFill>
+                        <a:schemeClr val="tx1"/>
+                      </a:solidFill>
+                      <a:prstDash val="solid"/>
+                      <a:round/>
+                      <a:headEnd type="none" w="med" len="med"/>
+                      <a:tailEnd type="none" w="med" len="med"/>
+                    </a:lnB>
+                    <a:noFill/>
+                  </a:tcPr>
+                </a:tc>
+                <a:tc>
+                  <a:txBody>
+                    <a:bodyPr/>
+                    <a:lstStyle/>
+                    <a:p>
+                      <a:pPr algn="ctr"/>
+                      <a:r>
+                        <a:rPr lang="en-US" sz="2500" b="0" kern="1200" dirty="0">
+                          <a:solidFill>
+                            <a:schemeClr val="tx1"/>
+                          </a:solidFill>
+                          <a:latin typeface="+mn-lt"/>
+                          <a:ea typeface="+mn-ea"/>
+                          <a:cs typeface="+mn-cs"/>
+                        </a:rPr>
+                        <a:t>14,500 Yen</a:t>
+                      </a:r>
+                    </a:p>
+                  </a:txBody>
+                  <a:tcPr>
+                    <a:lnL w="12700" cap="flat" cmpd="sng" algn="ctr">
+                      <a:solidFill>
+                        <a:schemeClr val="tx1"/>
+                      </a:solidFill>
+                      <a:prstDash val="solid"/>
+                      <a:round/>
+                      <a:headEnd type="none" w="med" len="med"/>
+                      <a:tailEnd type="none" w="med" len="med"/>
+                    </a:lnL>
+                    <a:lnR w="12700" cap="flat" cmpd="sng" algn="ctr">
+                      <a:solidFill>
+                        <a:schemeClr val="tx1"/>
+                      </a:solidFill>
+                      <a:prstDash val="solid"/>
+                      <a:round/>
+                      <a:headEnd type="none" w="med" len="med"/>
+                      <a:tailEnd type="none" w="med" len="med"/>
+                    </a:lnR>
+                    <a:lnT w="12700" cap="flat" cmpd="sng" algn="ctr">
+                      <a:solidFill>
+                        <a:schemeClr val="tx1"/>
+                      </a:solidFill>
+                      <a:prstDash val="solid"/>
+                      <a:round/>
+                      <a:headEnd type="none" w="med" len="med"/>
+                      <a:tailEnd type="none" w="med" len="med"/>
+                    </a:lnT>
+                    <a:lnB w="12700" cap="flat" cmpd="sng" algn="ctr">
+                      <a:solidFill>
+                        <a:schemeClr val="tx1"/>
+                      </a:solidFill>
+                      <a:prstDash val="solid"/>
+                      <a:round/>
+                      <a:headEnd type="none" w="med" len="med"/>
+                      <a:tailEnd type="none" w="med" len="med"/>
+                    </a:lnB>
+                    <a:noFill/>
+                  </a:tcPr>
+                </a:tc>
+                <a:extLst>
+                  <a:ext uri="{0D108BD9-81ED-4DB2-BD59-A6C34878D82A}">
+                    <a16:rowId xmlns:a16="http://schemas.microsoft.com/office/drawing/2014/main" val="115389113"/>
+                  </a:ext>
+                </a:extLst>
+              </a:tr>
+              <a:tr h="370840">
+                <a:tc>
+                  <a:txBody>
+                    <a:bodyPr/>
+                    <a:lstStyle/>
+                    <a:p>
+                      <a:pPr marL="0" marR="0" lvl="0" indent="0" algn="ctr" defTabSz="914400" rtl="0" eaLnBrk="1" fontAlgn="auto" latinLnBrk="0" hangingPunct="1">
+                        <a:lnSpc>
+                          <a:spcPct val="100000"/>
+                        </a:lnSpc>
+                        <a:spcBef>
+                          <a:spcPts val="0"/>
+                        </a:spcBef>
+                        <a:spcAft>
+                          <a:spcPts val="0"/>
+                        </a:spcAft>
+                        <a:buClrTx/>
+                        <a:buSzTx/>
+                        <a:buFontTx/>
+                        <a:buNone/>
+                        <a:tabLst/>
+                        <a:defRPr/>
+                      </a:pPr>
+                      <a:r>
+                        <a:rPr lang="en-US" sz="2500" b="0" kern="1200" dirty="0">
+                          <a:solidFill>
+                            <a:schemeClr val="tx1"/>
+                          </a:solidFill>
+                          <a:latin typeface="+mn-lt"/>
+                          <a:ea typeface="+mn-ea"/>
+                          <a:cs typeface="+mn-cs"/>
+                        </a:rPr>
+                        <a:t>Sphere cover for detector mount</a:t>
+                      </a:r>
+                    </a:p>
+                  </a:txBody>
+                  <a:tcPr>
+                    <a:lnL w="12700" cap="flat" cmpd="sng" algn="ctr">
+                      <a:solidFill>
+                        <a:schemeClr val="tx1"/>
+                      </a:solidFill>
+                      <a:prstDash val="solid"/>
+                      <a:round/>
+                      <a:headEnd type="none" w="med" len="med"/>
+                      <a:tailEnd type="none" w="med" len="med"/>
+                    </a:lnL>
+                    <a:lnR w="12700" cap="flat" cmpd="sng" algn="ctr">
+                      <a:solidFill>
+                        <a:schemeClr val="tx1"/>
+                      </a:solidFill>
+                      <a:prstDash val="solid"/>
+                      <a:round/>
+                      <a:headEnd type="none" w="med" len="med"/>
+                      <a:tailEnd type="none" w="med" len="med"/>
+                    </a:lnR>
+                    <a:lnT w="12700" cap="flat" cmpd="sng" algn="ctr">
+                      <a:solidFill>
+                        <a:schemeClr val="tx1"/>
+                      </a:solidFill>
+                      <a:prstDash val="solid"/>
+                      <a:round/>
+                      <a:headEnd type="none" w="med" len="med"/>
+                      <a:tailEnd type="none" w="med" len="med"/>
+                    </a:lnT>
+                    <a:lnB w="12700" cap="flat" cmpd="sng" algn="ctr">
+                      <a:solidFill>
+                        <a:schemeClr val="tx1"/>
+                      </a:solidFill>
+                      <a:prstDash val="solid"/>
+                      <a:round/>
+                      <a:headEnd type="none" w="med" len="med"/>
+                      <a:tailEnd type="none" w="med" len="med"/>
+                    </a:lnB>
+                    <a:noFill/>
+                  </a:tcPr>
+                </a:tc>
+                <a:tc>
+                  <a:txBody>
+                    <a:bodyPr/>
+                    <a:lstStyle/>
+                    <a:p>
+                      <a:pPr algn="ctr"/>
+                      <a:r>
+                        <a:rPr lang="en-US" sz="2500" b="0" kern="1200" dirty="0">
+                          <a:solidFill>
+                            <a:schemeClr val="tx1"/>
+                          </a:solidFill>
+                          <a:latin typeface="+mn-lt"/>
+                          <a:ea typeface="+mn-ea"/>
+                          <a:cs typeface="+mn-cs"/>
+                        </a:rPr>
+                        <a:t>12,500 Yen</a:t>
+                      </a:r>
+                    </a:p>
+                  </a:txBody>
+                  <a:tcPr>
+                    <a:lnL w="12700" cap="flat" cmpd="sng" algn="ctr">
+                      <a:solidFill>
+                        <a:schemeClr val="tx1"/>
+                      </a:solidFill>
+                      <a:prstDash val="solid"/>
+                      <a:round/>
+                      <a:headEnd type="none" w="med" len="med"/>
+                      <a:tailEnd type="none" w="med" len="med"/>
+                    </a:lnL>
+                    <a:lnR w="12700" cap="flat" cmpd="sng" algn="ctr">
+                      <a:solidFill>
+                        <a:schemeClr val="tx1"/>
+                      </a:solidFill>
+                      <a:prstDash val="solid"/>
+                      <a:round/>
+                      <a:headEnd type="none" w="med" len="med"/>
+                      <a:tailEnd type="none" w="med" len="med"/>
+                    </a:lnR>
+                    <a:lnT w="12700" cap="flat" cmpd="sng" algn="ctr">
+                      <a:solidFill>
+                        <a:schemeClr val="tx1"/>
+                      </a:solidFill>
+                      <a:prstDash val="solid"/>
+                      <a:round/>
+                      <a:headEnd type="none" w="med" len="med"/>
+                      <a:tailEnd type="none" w="med" len="med"/>
+                    </a:lnT>
+                    <a:lnB w="12700" cap="flat" cmpd="sng" algn="ctr">
+                      <a:solidFill>
+                        <a:schemeClr val="tx1"/>
+                      </a:solidFill>
+                      <a:prstDash val="solid"/>
+                      <a:round/>
+                      <a:headEnd type="none" w="med" len="med"/>
+                      <a:tailEnd type="none" w="med" len="med"/>
+                    </a:lnB>
+                    <a:noFill/>
+                  </a:tcPr>
+                </a:tc>
+                <a:extLst>
+                  <a:ext uri="{0D108BD9-81ED-4DB2-BD59-A6C34878D82A}">
+                    <a16:rowId xmlns:a16="http://schemas.microsoft.com/office/drawing/2014/main" val="3925323910"/>
+                  </a:ext>
+                </a:extLst>
+              </a:tr>
+              <a:tr h="370840">
+                <a:tc>
+                  <a:txBody>
+                    <a:bodyPr/>
+                    <a:lstStyle/>
+                    <a:p>
+                      <a:pPr algn="ctr"/>
+                      <a:r>
+                        <a:rPr lang="en-US" sz="2500" b="0" dirty="0">
+                          <a:solidFill>
+                            <a:schemeClr val="tx1"/>
+                          </a:solidFill>
+                        </a:rPr>
+                        <a:t>Sample Holder</a:t>
+                      </a:r>
+                    </a:p>
+                  </a:txBody>
+                  <a:tcPr>
+                    <a:lnL w="12700" cap="flat" cmpd="sng" algn="ctr">
+                      <a:solidFill>
+                        <a:schemeClr val="tx1"/>
+                      </a:solidFill>
+                      <a:prstDash val="solid"/>
+                      <a:round/>
+                      <a:headEnd type="none" w="med" len="med"/>
+                      <a:tailEnd type="none" w="med" len="med"/>
+                    </a:lnL>
+                    <a:lnR w="12700" cap="flat" cmpd="sng" algn="ctr">
+                      <a:solidFill>
+                        <a:schemeClr val="tx1"/>
+                      </a:solidFill>
+                      <a:prstDash val="solid"/>
+                      <a:round/>
+                      <a:headEnd type="none" w="med" len="med"/>
+                      <a:tailEnd type="none" w="med" len="med"/>
+                    </a:lnR>
+                    <a:lnT w="12700" cap="flat" cmpd="sng" algn="ctr">
+                      <a:solidFill>
+                        <a:schemeClr val="tx1"/>
+                      </a:solidFill>
+                      <a:prstDash val="solid"/>
+                      <a:round/>
+                      <a:headEnd type="none" w="med" len="med"/>
+                      <a:tailEnd type="none" w="med" len="med"/>
+                    </a:lnT>
+                    <a:lnB w="12700" cap="flat" cmpd="sng" algn="ctr">
+                      <a:solidFill>
+                        <a:schemeClr val="tx1"/>
+                      </a:solidFill>
+                      <a:prstDash val="solid"/>
+                      <a:round/>
+                      <a:headEnd type="none" w="med" len="med"/>
+                      <a:tailEnd type="none" w="med" len="med"/>
+                    </a:lnB>
+                    <a:noFill/>
+                  </a:tcPr>
+                </a:tc>
+                <a:tc>
+                  <a:txBody>
+                    <a:bodyPr/>
+                    <a:lstStyle/>
+                    <a:p>
+                      <a:pPr algn="ctr"/>
+                      <a:endParaRPr lang="en-US" sz="2500" dirty="0">
+                        <a:solidFill>
+                          <a:schemeClr val="tx1"/>
+                        </a:solidFill>
+                      </a:endParaRPr>
+                    </a:p>
+                  </a:txBody>
+                  <a:tcPr>
+                    <a:lnL w="12700" cap="flat" cmpd="sng" algn="ctr">
+                      <a:solidFill>
+                        <a:schemeClr val="tx1"/>
+                      </a:solidFill>
+                      <a:prstDash val="solid"/>
+                      <a:round/>
+                      <a:headEnd type="none" w="med" len="med"/>
+                      <a:tailEnd type="none" w="med" len="med"/>
+                    </a:lnL>
+                    <a:lnR w="12700" cap="flat" cmpd="sng" algn="ctr">
+                      <a:solidFill>
+                        <a:schemeClr val="tx1"/>
+                      </a:solidFill>
+                      <a:prstDash val="solid"/>
+                      <a:round/>
+                      <a:headEnd type="none" w="med" len="med"/>
+                      <a:tailEnd type="none" w="med" len="med"/>
+                    </a:lnR>
+                    <a:lnT w="12700" cap="flat" cmpd="sng" algn="ctr">
+                      <a:solidFill>
+                        <a:schemeClr val="tx1"/>
+                      </a:solidFill>
+                      <a:prstDash val="solid"/>
+                      <a:round/>
+                      <a:headEnd type="none" w="med" len="med"/>
+                      <a:tailEnd type="none" w="med" len="med"/>
+                    </a:lnT>
+                    <a:lnB w="12700" cap="flat" cmpd="sng" algn="ctr">
+                      <a:solidFill>
+                        <a:schemeClr val="tx1"/>
+                      </a:solidFill>
+                      <a:prstDash val="solid"/>
+                      <a:round/>
+                      <a:headEnd type="none" w="med" len="med"/>
+                      <a:tailEnd type="none" w="med" len="med"/>
+                    </a:lnB>
+                    <a:noFill/>
+                  </a:tcPr>
+                </a:tc>
+                <a:extLst>
+                  <a:ext uri="{0D108BD9-81ED-4DB2-BD59-A6C34878D82A}">
+                    <a16:rowId xmlns:a16="http://schemas.microsoft.com/office/drawing/2014/main" val="4210124330"/>
+                  </a:ext>
+                </a:extLst>
+              </a:tr>
+              <a:tr h="370840">
+                <a:tc>
+                  <a:txBody>
+                    <a:bodyPr/>
+                    <a:lstStyle/>
+                    <a:p>
+                      <a:pPr algn="ctr"/>
+                      <a:r>
+                        <a:rPr lang="en-US" sz="2500" b="0" dirty="0">
+                          <a:solidFill>
+                            <a:schemeClr val="tx1"/>
+                          </a:solidFill>
+                        </a:rPr>
+                        <a:t>Baffle [light blocker]</a:t>
+                      </a:r>
+                    </a:p>
+                  </a:txBody>
+                  <a:tcPr>
+                    <a:lnL w="12700" cap="flat" cmpd="sng" algn="ctr">
+                      <a:solidFill>
+                        <a:schemeClr val="tx1"/>
+                      </a:solidFill>
+                      <a:prstDash val="solid"/>
+                      <a:round/>
+                      <a:headEnd type="none" w="med" len="med"/>
+                      <a:tailEnd type="none" w="med" len="med"/>
+                    </a:lnL>
+                    <a:lnR w="12700" cap="flat" cmpd="sng" algn="ctr">
+                      <a:solidFill>
+                        <a:schemeClr val="tx1"/>
+                      </a:solidFill>
+                      <a:prstDash val="solid"/>
+                      <a:round/>
+                      <a:headEnd type="none" w="med" len="med"/>
+                      <a:tailEnd type="none" w="med" len="med"/>
+                    </a:lnR>
+                    <a:lnT w="12700" cap="flat" cmpd="sng" algn="ctr">
+                      <a:solidFill>
+                        <a:schemeClr val="tx1"/>
+                      </a:solidFill>
+                      <a:prstDash val="solid"/>
+                      <a:round/>
+                      <a:headEnd type="none" w="med" len="med"/>
+                      <a:tailEnd type="none" w="med" len="med"/>
+                    </a:lnT>
+                    <a:lnB w="12700" cap="flat" cmpd="sng" algn="ctr">
+                      <a:solidFill>
+                        <a:schemeClr val="tx1"/>
+                      </a:solidFill>
+                      <a:prstDash val="solid"/>
+                      <a:round/>
+                      <a:headEnd type="none" w="med" len="med"/>
+                      <a:tailEnd type="none" w="med" len="med"/>
+                    </a:lnB>
+                    <a:noFill/>
+                  </a:tcPr>
+                </a:tc>
+                <a:tc>
+                  <a:txBody>
+                    <a:bodyPr/>
+                    <a:lstStyle/>
+                    <a:p>
+                      <a:pPr algn="ctr"/>
+                      <a:r>
+                        <a:rPr lang="en-US" sz="2500" dirty="0">
+                          <a:solidFill>
+                            <a:schemeClr val="tx1"/>
+                          </a:solidFill>
+                        </a:rPr>
+                        <a:t>Included</a:t>
+                      </a:r>
+                    </a:p>
+                  </a:txBody>
+                  <a:tcPr>
+                    <a:lnL w="12700" cap="flat" cmpd="sng" algn="ctr">
+                      <a:solidFill>
+                        <a:schemeClr val="tx1"/>
+                      </a:solidFill>
+                      <a:prstDash val="solid"/>
+                      <a:round/>
+                      <a:headEnd type="none" w="med" len="med"/>
+                      <a:tailEnd type="none" w="med" len="med"/>
+                    </a:lnL>
+                    <a:lnR w="12700" cap="flat" cmpd="sng" algn="ctr">
+                      <a:solidFill>
+                        <a:schemeClr val="tx1"/>
+                      </a:solidFill>
+                      <a:prstDash val="solid"/>
+                      <a:round/>
+                      <a:headEnd type="none" w="med" len="med"/>
+                      <a:tailEnd type="none" w="med" len="med"/>
+                    </a:lnR>
+                    <a:lnT w="12700" cap="flat" cmpd="sng" algn="ctr">
+                      <a:solidFill>
+                        <a:schemeClr val="tx1"/>
+                      </a:solidFill>
+                      <a:prstDash val="solid"/>
+                      <a:round/>
+                      <a:headEnd type="none" w="med" len="med"/>
+                      <a:tailEnd type="none" w="med" len="med"/>
+                    </a:lnT>
+                    <a:lnB w="12700" cap="flat" cmpd="sng" algn="ctr">
+                      <a:solidFill>
+                        <a:schemeClr val="tx1"/>
+                      </a:solidFill>
+                      <a:prstDash val="solid"/>
+                      <a:round/>
+                      <a:headEnd type="none" w="med" len="med"/>
+                      <a:tailEnd type="none" w="med" len="med"/>
+                    </a:lnB>
+                    <a:noFill/>
+                  </a:tcPr>
+                </a:tc>
+                <a:extLst>
+                  <a:ext uri="{0D108BD9-81ED-4DB2-BD59-A6C34878D82A}">
+                    <a16:rowId xmlns:a16="http://schemas.microsoft.com/office/drawing/2014/main" val="4104716639"/>
+                  </a:ext>
+                </a:extLst>
+              </a:tr>
+              <a:tr h="370840">
+                <a:tc>
+                  <a:txBody>
+                    <a:bodyPr/>
+                    <a:lstStyle/>
+                    <a:p>
+                      <a:pPr algn="ctr"/>
+                      <a:r>
+                        <a:rPr lang="en-US" sz="2500" b="0" dirty="0">
+                          <a:solidFill>
+                            <a:schemeClr val="tx1"/>
+                          </a:solidFill>
+                        </a:rPr>
+                        <a:t>850 nm laser light</a:t>
+                      </a:r>
+                    </a:p>
+                  </a:txBody>
+                  <a:tcPr>
+                    <a:lnL w="12700" cap="flat" cmpd="sng" algn="ctr">
+                      <a:solidFill>
+                        <a:schemeClr val="tx1"/>
+                      </a:solidFill>
+                      <a:prstDash val="solid"/>
+                      <a:round/>
+                      <a:headEnd type="none" w="med" len="med"/>
+                      <a:tailEnd type="none" w="med" len="med"/>
+                    </a:lnL>
+                    <a:lnR w="12700" cap="flat" cmpd="sng" algn="ctr">
+                      <a:solidFill>
+                        <a:schemeClr val="tx1"/>
+                      </a:solidFill>
+                      <a:prstDash val="solid"/>
+                      <a:round/>
+                      <a:headEnd type="none" w="med" len="med"/>
+                      <a:tailEnd type="none" w="med" len="med"/>
+                    </a:lnR>
+                    <a:lnT w="12700" cap="flat" cmpd="sng" algn="ctr">
+                      <a:solidFill>
+                        <a:schemeClr val="tx1"/>
+                      </a:solidFill>
+                      <a:prstDash val="solid"/>
+                      <a:round/>
+                      <a:headEnd type="none" w="med" len="med"/>
+                      <a:tailEnd type="none" w="med" len="med"/>
+                    </a:lnT>
+                    <a:lnB w="12700" cap="flat" cmpd="sng" algn="ctr">
+                      <a:solidFill>
+                        <a:schemeClr val="tx1"/>
+                      </a:solidFill>
+                      <a:prstDash val="solid"/>
+                      <a:round/>
+                      <a:headEnd type="none" w="med" len="med"/>
+                      <a:tailEnd type="none" w="med" len="med"/>
+                    </a:lnB>
+                    <a:noFill/>
+                  </a:tcPr>
+                </a:tc>
+                <a:tc>
+                  <a:txBody>
+                    <a:bodyPr/>
+                    <a:lstStyle/>
+                    <a:p>
+                      <a:pPr algn="ctr"/>
+                      <a:r>
+                        <a:rPr lang="en-US" sz="2500" dirty="0">
+                          <a:solidFill>
+                            <a:schemeClr val="tx1"/>
+                          </a:solidFill>
+                        </a:rPr>
+                        <a:t>4,000 Yen</a:t>
+                      </a:r>
+                    </a:p>
+                  </a:txBody>
+                  <a:tcPr>
+                    <a:lnL w="12700" cap="flat" cmpd="sng" algn="ctr">
+                      <a:solidFill>
+                        <a:schemeClr val="tx1"/>
+                      </a:solidFill>
+                      <a:prstDash val="solid"/>
+                      <a:round/>
+                      <a:headEnd type="none" w="med" len="med"/>
+                      <a:tailEnd type="none" w="med" len="med"/>
+                    </a:lnL>
+                    <a:lnR w="12700" cap="flat" cmpd="sng" algn="ctr">
+                      <a:solidFill>
+                        <a:schemeClr val="tx1"/>
+                      </a:solidFill>
+                      <a:prstDash val="solid"/>
+                      <a:round/>
+                      <a:headEnd type="none" w="med" len="med"/>
+                      <a:tailEnd type="none" w="med" len="med"/>
+                    </a:lnR>
+                    <a:lnT w="12700" cap="flat" cmpd="sng" algn="ctr">
+                      <a:solidFill>
+                        <a:schemeClr val="tx1"/>
+                      </a:solidFill>
+                      <a:prstDash val="solid"/>
+                      <a:round/>
+                      <a:headEnd type="none" w="med" len="med"/>
+                      <a:tailEnd type="none" w="med" len="med"/>
+                    </a:lnT>
+                    <a:lnB w="12700" cap="flat" cmpd="sng" algn="ctr">
+                      <a:solidFill>
+                        <a:schemeClr val="tx1"/>
+                      </a:solidFill>
+                      <a:prstDash val="solid"/>
+                      <a:round/>
+                      <a:headEnd type="none" w="med" len="med"/>
+                      <a:tailEnd type="none" w="med" len="med"/>
+                    </a:lnB>
+                    <a:noFill/>
+                  </a:tcPr>
+                </a:tc>
+                <a:extLst>
+                  <a:ext uri="{0D108BD9-81ED-4DB2-BD59-A6C34878D82A}">
+                    <a16:rowId xmlns:a16="http://schemas.microsoft.com/office/drawing/2014/main" val="3665133595"/>
+                  </a:ext>
+                </a:extLst>
+              </a:tr>
+              <a:tr h="370840">
+                <a:tc>
+                  <a:txBody>
+                    <a:bodyPr/>
+                    <a:lstStyle/>
+                    <a:p>
+                      <a:pPr algn="ctr"/>
+                      <a:r>
+                        <a:rPr lang="en-US" sz="2500" b="0">
+                          <a:solidFill>
+                            <a:schemeClr val="tx1"/>
+                          </a:solidFill>
+                        </a:rPr>
+                        <a:t>HFCT </a:t>
+                      </a:r>
+                      <a:r>
+                        <a:rPr lang="en-US" sz="2500" b="0" dirty="0">
+                          <a:solidFill>
+                            <a:schemeClr val="tx1"/>
+                          </a:solidFill>
+                        </a:rPr>
+                        <a:t>sensor </a:t>
+                      </a:r>
+                    </a:p>
+                  </a:txBody>
+                  <a:tcPr>
+                    <a:lnL w="12700" cap="flat" cmpd="sng" algn="ctr">
+                      <a:solidFill>
+                        <a:schemeClr val="tx1"/>
+                      </a:solidFill>
+                      <a:prstDash val="solid"/>
+                      <a:round/>
+                      <a:headEnd type="none" w="med" len="med"/>
+                      <a:tailEnd type="none" w="med" len="med"/>
+                    </a:lnL>
+                    <a:lnR w="12700" cap="flat" cmpd="sng" algn="ctr">
+                      <a:solidFill>
+                        <a:schemeClr val="tx1"/>
+                      </a:solidFill>
+                      <a:prstDash val="solid"/>
+                      <a:round/>
+                      <a:headEnd type="none" w="med" len="med"/>
+                      <a:tailEnd type="none" w="med" len="med"/>
+                    </a:lnR>
+                    <a:lnT w="12700" cap="flat" cmpd="sng" algn="ctr">
+                      <a:solidFill>
+                        <a:schemeClr val="tx1"/>
+                      </a:solidFill>
+                      <a:prstDash val="solid"/>
+                      <a:round/>
+                      <a:headEnd type="none" w="med" len="med"/>
+                      <a:tailEnd type="none" w="med" len="med"/>
+                    </a:lnT>
+                    <a:lnB w="12700" cap="flat" cmpd="sng" algn="ctr">
+                      <a:solidFill>
+                        <a:schemeClr val="tx1"/>
+                      </a:solidFill>
+                      <a:prstDash val="solid"/>
+                      <a:round/>
+                      <a:headEnd type="none" w="med" len="med"/>
+                      <a:tailEnd type="none" w="med" len="med"/>
+                    </a:lnB>
+                    <a:noFill/>
+                  </a:tcPr>
+                </a:tc>
+                <a:tc>
+                  <a:txBody>
+                    <a:bodyPr/>
+                    <a:lstStyle/>
+                    <a:p>
+                      <a:pPr algn="ctr"/>
+                      <a:endParaRPr lang="en-US" sz="2500" dirty="0">
+                        <a:solidFill>
+                          <a:schemeClr val="tx1"/>
+                        </a:solidFill>
+                      </a:endParaRPr>
+                    </a:p>
+                  </a:txBody>
+                  <a:tcPr>
+                    <a:lnL w="12700" cap="flat" cmpd="sng" algn="ctr">
+                      <a:solidFill>
+                        <a:schemeClr val="tx1"/>
+                      </a:solidFill>
+                      <a:prstDash val="solid"/>
+                      <a:round/>
+                      <a:headEnd type="none" w="med" len="med"/>
+                      <a:tailEnd type="none" w="med" len="med"/>
+                    </a:lnL>
+                    <a:lnR w="12700" cap="flat" cmpd="sng" algn="ctr">
+                      <a:solidFill>
+                        <a:schemeClr val="tx1"/>
+                      </a:solidFill>
+                      <a:prstDash val="solid"/>
+                      <a:round/>
+                      <a:headEnd type="none" w="med" len="med"/>
+                      <a:tailEnd type="none" w="med" len="med"/>
+                    </a:lnR>
+                    <a:lnT w="12700" cap="flat" cmpd="sng" algn="ctr">
+                      <a:solidFill>
+                        <a:schemeClr val="tx1"/>
+                      </a:solidFill>
+                      <a:prstDash val="solid"/>
+                      <a:round/>
+                      <a:headEnd type="none" w="med" len="med"/>
+                      <a:tailEnd type="none" w="med" len="med"/>
+                    </a:lnT>
+                    <a:lnB w="12700" cap="flat" cmpd="sng" algn="ctr">
+                      <a:solidFill>
+                        <a:schemeClr val="tx1"/>
+                      </a:solidFill>
+                      <a:prstDash val="solid"/>
+                      <a:round/>
+                      <a:headEnd type="none" w="med" len="med"/>
+                      <a:tailEnd type="none" w="med" len="med"/>
+                    </a:lnB>
+                    <a:noFill/>
+                  </a:tcPr>
+                </a:tc>
+                <a:extLst>
+                  <a:ext uri="{0D108BD9-81ED-4DB2-BD59-A6C34878D82A}">
+                    <a16:rowId xmlns:a16="http://schemas.microsoft.com/office/drawing/2014/main" val="2984547604"/>
+                  </a:ext>
+                </a:extLst>
+              </a:tr>
+              <a:tr h="370840">
+                <a:tc>
+                  <a:txBody>
+                    <a:bodyPr/>
+                    <a:lstStyle/>
+                    <a:p>
+                      <a:pPr algn="ctr"/>
+                      <a:r>
+                        <a:rPr lang="en-US" sz="2500" b="0" dirty="0">
+                          <a:solidFill>
+                            <a:schemeClr val="tx1"/>
+                          </a:solidFill>
+                        </a:rPr>
+                        <a:t>Spectrometer</a:t>
+                      </a:r>
+                    </a:p>
+                  </a:txBody>
+                  <a:tcPr>
+                    <a:lnL w="12700" cap="flat" cmpd="sng" algn="ctr">
+                      <a:solidFill>
+                        <a:schemeClr val="tx1"/>
+                      </a:solidFill>
+                      <a:prstDash val="solid"/>
+                      <a:round/>
+                      <a:headEnd type="none" w="med" len="med"/>
+                      <a:tailEnd type="none" w="med" len="med"/>
+                    </a:lnL>
+                    <a:lnR w="12700" cap="flat" cmpd="sng" algn="ctr">
+                      <a:solidFill>
+                        <a:schemeClr val="tx1"/>
+                      </a:solidFill>
+                      <a:prstDash val="solid"/>
+                      <a:round/>
+                      <a:headEnd type="none" w="med" len="med"/>
+                      <a:tailEnd type="none" w="med" len="med"/>
+                    </a:lnR>
+                    <a:lnT w="12700" cap="flat" cmpd="sng" algn="ctr">
+                      <a:solidFill>
+                        <a:schemeClr val="tx1"/>
+                      </a:solidFill>
+                      <a:prstDash val="solid"/>
+                      <a:round/>
+                      <a:headEnd type="none" w="med" len="med"/>
+                      <a:tailEnd type="none" w="med" len="med"/>
+                    </a:lnT>
+                    <a:lnB w="12700" cap="flat" cmpd="sng" algn="ctr">
+                      <a:solidFill>
+                        <a:schemeClr val="tx1"/>
+                      </a:solidFill>
+                      <a:prstDash val="solid"/>
+                      <a:round/>
+                      <a:headEnd type="none" w="med" len="med"/>
+                      <a:tailEnd type="none" w="med" len="med"/>
+                    </a:lnB>
+                    <a:noFill/>
+                  </a:tcPr>
+                </a:tc>
+                <a:tc>
+                  <a:txBody>
+                    <a:bodyPr/>
+                    <a:lstStyle/>
+                    <a:p>
+                      <a:pPr algn="ctr"/>
+                      <a:r>
+                        <a:rPr lang="en-US" sz="2500" dirty="0">
+                          <a:solidFill>
+                            <a:schemeClr val="tx1"/>
+                          </a:solidFill>
+                        </a:rPr>
+                        <a:t>77,702 Yen</a:t>
+                      </a:r>
+                    </a:p>
+                  </a:txBody>
+                  <a:tcPr>
+                    <a:lnL w="12700" cap="flat" cmpd="sng" algn="ctr">
+                      <a:solidFill>
+                        <a:schemeClr val="tx1"/>
+                      </a:solidFill>
+                      <a:prstDash val="solid"/>
+                      <a:round/>
+                      <a:headEnd type="none" w="med" len="med"/>
+                      <a:tailEnd type="none" w="med" len="med"/>
+                    </a:lnL>
+                    <a:lnR w="12700" cap="flat" cmpd="sng" algn="ctr">
+                      <a:solidFill>
+                        <a:schemeClr val="tx1"/>
+                      </a:solidFill>
+                      <a:prstDash val="solid"/>
+                      <a:round/>
+                      <a:headEnd type="none" w="med" len="med"/>
+                      <a:tailEnd type="none" w="med" len="med"/>
+                    </a:lnR>
+                    <a:lnT w="12700" cap="flat" cmpd="sng" algn="ctr">
+                      <a:solidFill>
+                        <a:schemeClr val="tx1"/>
+                      </a:solidFill>
+                      <a:prstDash val="solid"/>
+                      <a:round/>
+                      <a:headEnd type="none" w="med" len="med"/>
+                      <a:tailEnd type="none" w="med" len="med"/>
+                    </a:lnT>
+                    <a:lnB w="12700" cap="flat" cmpd="sng" algn="ctr">
+                      <a:solidFill>
+                        <a:schemeClr val="tx1"/>
+                      </a:solidFill>
+                      <a:prstDash val="solid"/>
+                      <a:round/>
+                      <a:headEnd type="none" w="med" len="med"/>
+                      <a:tailEnd type="none" w="med" len="med"/>
+                    </a:lnB>
+                    <a:noFill/>
+                  </a:tcPr>
+                </a:tc>
+                <a:extLst>
+                  <a:ext uri="{0D108BD9-81ED-4DB2-BD59-A6C34878D82A}">
+                    <a16:rowId xmlns:a16="http://schemas.microsoft.com/office/drawing/2014/main" val="1557026993"/>
+                  </a:ext>
+                </a:extLst>
+              </a:tr>
+              <a:tr h="370840">
+                <a:tc>
+                  <a:txBody>
+                    <a:bodyPr/>
+                    <a:lstStyle/>
+                    <a:p>
+                      <a:pPr algn="ctr"/>
+                      <a:r>
+                        <a:rPr lang="en-US" sz="2500" b="0" dirty="0">
+                          <a:solidFill>
+                            <a:schemeClr val="tx1"/>
+                          </a:solidFill>
+                        </a:rPr>
+                        <a:t>Optical Fiber </a:t>
+                      </a:r>
+                    </a:p>
+                  </a:txBody>
+                  <a:tcPr>
+                    <a:lnL w="12700" cap="flat" cmpd="sng" algn="ctr">
+                      <a:solidFill>
+                        <a:schemeClr val="tx1"/>
+                      </a:solidFill>
+                      <a:prstDash val="solid"/>
+                      <a:round/>
+                      <a:headEnd type="none" w="med" len="med"/>
+                      <a:tailEnd type="none" w="med" len="med"/>
+                    </a:lnL>
+                    <a:lnR w="12700" cap="flat" cmpd="sng" algn="ctr">
+                      <a:solidFill>
+                        <a:schemeClr val="tx1"/>
+                      </a:solidFill>
+                      <a:prstDash val="solid"/>
+                      <a:round/>
+                      <a:headEnd type="none" w="med" len="med"/>
+                      <a:tailEnd type="none" w="med" len="med"/>
+                    </a:lnR>
+                    <a:lnT w="12700" cap="flat" cmpd="sng" algn="ctr">
+                      <a:solidFill>
+                        <a:schemeClr val="tx1"/>
+                      </a:solidFill>
+                      <a:prstDash val="solid"/>
+                      <a:round/>
+                      <a:headEnd type="none" w="med" len="med"/>
+                      <a:tailEnd type="none" w="med" len="med"/>
+                    </a:lnT>
+                    <a:lnB w="12700" cap="flat" cmpd="sng" algn="ctr">
+                      <a:solidFill>
+                        <a:schemeClr val="tx1"/>
+                      </a:solidFill>
+                      <a:prstDash val="solid"/>
+                      <a:round/>
+                      <a:headEnd type="none" w="med" len="med"/>
+                      <a:tailEnd type="none" w="med" len="med"/>
+                    </a:lnB>
+                    <a:noFill/>
+                  </a:tcPr>
+                </a:tc>
+                <a:tc>
+                  <a:txBody>
+                    <a:bodyPr/>
+                    <a:lstStyle/>
+                    <a:p>
+                      <a:pPr algn="ctr"/>
+                      <a:endParaRPr lang="en-US" sz="2500" dirty="0">
+                        <a:solidFill>
+                          <a:schemeClr val="tx1"/>
+                        </a:solidFill>
+                      </a:endParaRPr>
+                    </a:p>
+                  </a:txBody>
+                  <a:tcPr>
+                    <a:lnL w="12700" cap="flat" cmpd="sng" algn="ctr">
+                      <a:solidFill>
+                        <a:schemeClr val="tx1"/>
+                      </a:solidFill>
+                      <a:prstDash val="solid"/>
+                      <a:round/>
+                      <a:headEnd type="none" w="med" len="med"/>
+                      <a:tailEnd type="none" w="med" len="med"/>
+                    </a:lnL>
+                    <a:lnR w="12700" cap="flat" cmpd="sng" algn="ctr">
+                      <a:solidFill>
+                        <a:schemeClr val="tx1"/>
+                      </a:solidFill>
+                      <a:prstDash val="solid"/>
+                      <a:round/>
+                      <a:headEnd type="none" w="med" len="med"/>
+                      <a:tailEnd type="none" w="med" len="med"/>
+                    </a:lnR>
+                    <a:lnT w="12700" cap="flat" cmpd="sng" algn="ctr">
+                      <a:solidFill>
+                        <a:schemeClr val="tx1"/>
+                      </a:solidFill>
+                      <a:prstDash val="solid"/>
+                      <a:round/>
+                      <a:headEnd type="none" w="med" len="med"/>
+                      <a:tailEnd type="none" w="med" len="med"/>
+                    </a:lnT>
+                    <a:lnB w="12700" cap="flat" cmpd="sng" algn="ctr">
+                      <a:solidFill>
+                        <a:schemeClr val="tx1"/>
+                      </a:solidFill>
+                      <a:prstDash val="solid"/>
+                      <a:round/>
+                      <a:headEnd type="none" w="med" len="med"/>
+                      <a:tailEnd type="none" w="med" len="med"/>
+                    </a:lnB>
+                    <a:noFill/>
+                  </a:tcPr>
+                </a:tc>
+                <a:extLst>
+                  <a:ext uri="{0D108BD9-81ED-4DB2-BD59-A6C34878D82A}">
+                    <a16:rowId xmlns:a16="http://schemas.microsoft.com/office/drawing/2014/main" val="3347984046"/>
+                  </a:ext>
+                </a:extLst>
+              </a:tr>
+              <a:tr h="370840">
+                <a:tc>
+                  <a:txBody>
+                    <a:bodyPr/>
+                    <a:lstStyle/>
+                    <a:p>
+                      <a:pPr algn="ctr"/>
+                      <a:r>
+                        <a:rPr lang="en-US" sz="2500" b="0" dirty="0">
+                          <a:solidFill>
+                            <a:schemeClr val="tx1"/>
+                          </a:solidFill>
+                        </a:rPr>
+                        <a:t>Raspberry Pi 5</a:t>
+                      </a:r>
+                    </a:p>
+                  </a:txBody>
+                  <a:tcPr>
+                    <a:lnL w="12700" cap="flat" cmpd="sng" algn="ctr">
+                      <a:solidFill>
+                        <a:schemeClr val="tx1"/>
+                      </a:solidFill>
+                      <a:prstDash val="solid"/>
+                      <a:round/>
+                      <a:headEnd type="none" w="med" len="med"/>
+                      <a:tailEnd type="none" w="med" len="med"/>
+                    </a:lnL>
+                    <a:lnR w="12700" cap="flat" cmpd="sng" algn="ctr">
+                      <a:solidFill>
+                        <a:schemeClr val="tx1"/>
+                      </a:solidFill>
+                      <a:prstDash val="solid"/>
+                      <a:round/>
+                      <a:headEnd type="none" w="med" len="med"/>
+                      <a:tailEnd type="none" w="med" len="med"/>
+                    </a:lnR>
+                    <a:lnT w="12700" cap="flat" cmpd="sng" algn="ctr">
+                      <a:solidFill>
+                        <a:schemeClr val="tx1"/>
+                      </a:solidFill>
+                      <a:prstDash val="solid"/>
+                      <a:round/>
+                      <a:headEnd type="none" w="med" len="med"/>
+                      <a:tailEnd type="none" w="med" len="med"/>
+                    </a:lnT>
+                    <a:lnB w="12700" cap="flat" cmpd="sng" algn="ctr">
+                      <a:solidFill>
+                        <a:schemeClr val="tx1"/>
+                      </a:solidFill>
+                      <a:prstDash val="solid"/>
+                      <a:round/>
+                      <a:headEnd type="none" w="med" len="med"/>
+                      <a:tailEnd type="none" w="med" len="med"/>
+                    </a:lnB>
+                    <a:noFill/>
+                  </a:tcPr>
+                </a:tc>
+                <a:tc>
+                  <a:txBody>
+                    <a:bodyPr/>
+                    <a:lstStyle/>
+                    <a:p>
+                      <a:pPr algn="ctr"/>
+                      <a:r>
+                        <a:rPr lang="en-US" sz="2500" dirty="0">
+                          <a:solidFill>
+                            <a:schemeClr val="tx1"/>
+                          </a:solidFill>
+                        </a:rPr>
+                        <a:t>N/A</a:t>
+                      </a:r>
+                    </a:p>
+                  </a:txBody>
+                  <a:tcPr>
+                    <a:lnL w="12700" cap="flat" cmpd="sng" algn="ctr">
+                      <a:solidFill>
+                        <a:schemeClr val="tx1"/>
+                      </a:solidFill>
+                      <a:prstDash val="solid"/>
+                      <a:round/>
+                      <a:headEnd type="none" w="med" len="med"/>
+                      <a:tailEnd type="none" w="med" len="med"/>
+                    </a:lnL>
+                    <a:lnR w="12700" cap="flat" cmpd="sng" algn="ctr">
+                      <a:solidFill>
+                        <a:schemeClr val="tx1"/>
+                      </a:solidFill>
+                      <a:prstDash val="solid"/>
+                      <a:round/>
+                      <a:headEnd type="none" w="med" len="med"/>
+                      <a:tailEnd type="none" w="med" len="med"/>
+                    </a:lnR>
+                    <a:lnT w="12700" cap="flat" cmpd="sng" algn="ctr">
+                      <a:solidFill>
+                        <a:schemeClr val="tx1"/>
+                      </a:solidFill>
+                      <a:prstDash val="solid"/>
+                      <a:round/>
+                      <a:headEnd type="none" w="med" len="med"/>
+                      <a:tailEnd type="none" w="med" len="med"/>
+                    </a:lnT>
+                    <a:lnB w="12700" cap="flat" cmpd="sng" algn="ctr">
+                      <a:solidFill>
+                        <a:schemeClr val="tx1"/>
+                      </a:solidFill>
+                      <a:prstDash val="solid"/>
+                      <a:round/>
+                      <a:headEnd type="none" w="med" len="med"/>
+                      <a:tailEnd type="none" w="med" len="med"/>
+                    </a:lnB>
+                    <a:noFill/>
+                  </a:tcPr>
+                </a:tc>
+                <a:extLst>
+                  <a:ext uri="{0D108BD9-81ED-4DB2-BD59-A6C34878D82A}">
+                    <a16:rowId xmlns:a16="http://schemas.microsoft.com/office/drawing/2014/main" val="698956324"/>
+                  </a:ext>
+                </a:extLst>
+              </a:tr>
+              <a:tr h="370840">
+                <a:tc>
+                  <a:txBody>
+                    <a:bodyPr/>
+                    <a:lstStyle/>
+                    <a:p>
+                      <a:pPr marL="0" marR="0" lvl="0" indent="0" algn="ctr" defTabSz="914400" rtl="0" eaLnBrk="1" fontAlgn="auto" latinLnBrk="0" hangingPunct="1">
+                        <a:lnSpc>
+                          <a:spcPct val="100000"/>
+                        </a:lnSpc>
+                        <a:spcBef>
+                          <a:spcPts val="0"/>
+                        </a:spcBef>
+                        <a:spcAft>
+                          <a:spcPts val="0"/>
+                        </a:spcAft>
+                        <a:buClrTx/>
+                        <a:buSzTx/>
+                        <a:buFontTx/>
+                        <a:buNone/>
+                        <a:tabLst/>
+                        <a:defRPr/>
+                      </a:pPr>
+                      <a:r>
+                        <a:rPr lang="en-US" sz="2500" b="0" i="0" kern="1200" dirty="0">
+                          <a:solidFill>
+                            <a:schemeClr val="dk1"/>
+                          </a:solidFill>
+                          <a:effectLst/>
+                          <a:latin typeface="+mn-lt"/>
+                          <a:ea typeface="+mn-ea"/>
+                          <a:cs typeface="+mn-cs"/>
+                        </a:rPr>
+                        <a:t> </a:t>
+                      </a:r>
+                      <a:r>
+                        <a:rPr lang="en-US" sz="2500" b="0" i="0" kern="1200" dirty="0" err="1">
+                          <a:solidFill>
+                            <a:schemeClr val="dk1"/>
+                          </a:solidFill>
+                          <a:effectLst/>
+                          <a:latin typeface="+mn-lt"/>
+                          <a:ea typeface="+mn-ea"/>
+                          <a:cs typeface="+mn-cs"/>
+                        </a:rPr>
+                        <a:t>GeeekPi</a:t>
+                      </a:r>
+                      <a:r>
+                        <a:rPr lang="en-US" sz="2500" b="0" i="0" kern="1200" dirty="0">
+                          <a:solidFill>
+                            <a:schemeClr val="dk1"/>
+                          </a:solidFill>
+                          <a:effectLst/>
+                          <a:latin typeface="+mn-lt"/>
+                          <a:ea typeface="+mn-ea"/>
+                          <a:cs typeface="+mn-cs"/>
+                        </a:rPr>
+                        <a:t> Metal Case and N04 PCIe M.2 Key-M </a:t>
+                      </a:r>
+                      <a:r>
+                        <a:rPr lang="en-US" sz="2500" b="0" i="0" kern="1200" dirty="0" err="1">
+                          <a:solidFill>
+                            <a:schemeClr val="dk1"/>
+                          </a:solidFill>
+                          <a:effectLst/>
+                          <a:latin typeface="+mn-lt"/>
+                          <a:ea typeface="+mn-ea"/>
+                          <a:cs typeface="+mn-cs"/>
+                        </a:rPr>
+                        <a:t>NVMe</a:t>
+                      </a:r>
+                      <a:r>
+                        <a:rPr lang="en-US" sz="2500" b="0" i="0" kern="1200" dirty="0">
+                          <a:solidFill>
+                            <a:schemeClr val="dk1"/>
+                          </a:solidFill>
+                          <a:effectLst/>
+                          <a:latin typeface="+mn-lt"/>
+                          <a:ea typeface="+mn-ea"/>
+                          <a:cs typeface="+mn-cs"/>
+                        </a:rPr>
+                        <a:t> SSD PCIe Peripheral Board for Raspberry Pi 5 (Metal Case &amp; Expansion Board &amp; Active Cooling Fan)</a:t>
+                      </a:r>
+                    </a:p>
+                  </a:txBody>
+                  <a:tcPr>
+                    <a:lnL w="12700" cap="flat" cmpd="sng" algn="ctr">
+                      <a:solidFill>
+                        <a:schemeClr val="tx1"/>
+                      </a:solidFill>
+                      <a:prstDash val="solid"/>
+                      <a:round/>
+                      <a:headEnd type="none" w="med" len="med"/>
+                      <a:tailEnd type="none" w="med" len="med"/>
+                    </a:lnL>
+                    <a:lnR w="12700" cap="flat" cmpd="sng" algn="ctr">
+                      <a:solidFill>
+                        <a:schemeClr val="tx1"/>
+                      </a:solidFill>
+                      <a:prstDash val="solid"/>
+                      <a:round/>
+                      <a:headEnd type="none" w="med" len="med"/>
+                      <a:tailEnd type="none" w="med" len="med"/>
+                    </a:lnR>
+                    <a:lnT w="12700" cap="flat" cmpd="sng" algn="ctr">
+                      <a:solidFill>
+                        <a:schemeClr val="tx1"/>
+                      </a:solidFill>
+                      <a:prstDash val="solid"/>
+                      <a:round/>
+                      <a:headEnd type="none" w="med" len="med"/>
+                      <a:tailEnd type="none" w="med" len="med"/>
+                    </a:lnT>
+                    <a:lnB w="12700" cap="flat" cmpd="sng" algn="ctr">
+                      <a:solidFill>
+                        <a:schemeClr val="tx1"/>
+                      </a:solidFill>
+                      <a:prstDash val="solid"/>
+                      <a:round/>
+                      <a:headEnd type="none" w="med" len="med"/>
+                      <a:tailEnd type="none" w="med" len="med"/>
+                    </a:lnB>
+                    <a:noFill/>
+                  </a:tcPr>
+                </a:tc>
+                <a:tc>
+                  <a:txBody>
+                    <a:bodyPr/>
+                    <a:lstStyle/>
+                    <a:p>
+                      <a:pPr algn="ctr"/>
+                      <a:r>
+                        <a:rPr lang="en-US" sz="2500" b="0" i="0" kern="1200" dirty="0">
+                          <a:solidFill>
+                            <a:schemeClr val="dk1"/>
+                          </a:solidFill>
+                          <a:effectLst/>
+                          <a:latin typeface="+mn-lt"/>
+                          <a:ea typeface="+mn-ea"/>
+                          <a:cs typeface="+mn-cs"/>
+                        </a:rPr>
+                        <a:t>4,099</a:t>
+                      </a:r>
+                      <a:r>
+                        <a:rPr lang="en-US" sz="2500" dirty="0">
+                          <a:solidFill>
+                            <a:schemeClr val="tx1"/>
+                          </a:solidFill>
+                        </a:rPr>
+                        <a:t> Yen</a:t>
+                      </a:r>
+                    </a:p>
+                  </a:txBody>
+                  <a:tcPr>
+                    <a:lnL w="12700" cap="flat" cmpd="sng" algn="ctr">
+                      <a:solidFill>
+                        <a:schemeClr val="tx1"/>
+                      </a:solidFill>
+                      <a:prstDash val="solid"/>
+                      <a:round/>
+                      <a:headEnd type="none" w="med" len="med"/>
+                      <a:tailEnd type="none" w="med" len="med"/>
+                    </a:lnL>
+                    <a:lnR w="12700" cap="flat" cmpd="sng" algn="ctr">
+                      <a:solidFill>
+                        <a:schemeClr val="tx1"/>
+                      </a:solidFill>
+                      <a:prstDash val="solid"/>
+                      <a:round/>
+                      <a:headEnd type="none" w="med" len="med"/>
+                      <a:tailEnd type="none" w="med" len="med"/>
+                    </a:lnR>
+                    <a:lnT w="12700" cap="flat" cmpd="sng" algn="ctr">
+                      <a:solidFill>
+                        <a:schemeClr val="tx1"/>
+                      </a:solidFill>
+                      <a:prstDash val="solid"/>
+                      <a:round/>
+                      <a:headEnd type="none" w="med" len="med"/>
+                      <a:tailEnd type="none" w="med" len="med"/>
+                    </a:lnT>
+                    <a:lnB w="12700" cap="flat" cmpd="sng" algn="ctr">
+                      <a:solidFill>
+                        <a:schemeClr val="tx1"/>
+                      </a:solidFill>
+                      <a:prstDash val="solid"/>
+                      <a:round/>
+                      <a:headEnd type="none" w="med" len="med"/>
+                      <a:tailEnd type="none" w="med" len="med"/>
+                    </a:lnB>
+                    <a:noFill/>
+                  </a:tcPr>
+                </a:tc>
+                <a:extLst>
+                  <a:ext uri="{0D108BD9-81ED-4DB2-BD59-A6C34878D82A}">
+                    <a16:rowId xmlns:a16="http://schemas.microsoft.com/office/drawing/2014/main" val="2038220897"/>
+                  </a:ext>
+                </a:extLst>
+              </a:tr>
+              <a:tr h="370840">
+                <a:tc>
+                  <a:txBody>
+                    <a:bodyPr/>
+                    <a:lstStyle/>
+                    <a:p>
+                      <a:pPr marL="0" marR="0" lvl="0" indent="0" algn="ctr" defTabSz="914400" rtl="0" eaLnBrk="1" fontAlgn="auto" latinLnBrk="0" hangingPunct="1">
+                        <a:lnSpc>
+                          <a:spcPct val="100000"/>
+                        </a:lnSpc>
+                        <a:spcBef>
+                          <a:spcPts val="0"/>
+                        </a:spcBef>
+                        <a:spcAft>
+                          <a:spcPts val="0"/>
+                        </a:spcAft>
+                        <a:buClrTx/>
+                        <a:buSzTx/>
+                        <a:buFontTx/>
+                        <a:buNone/>
+                        <a:tabLst/>
+                        <a:defRPr/>
+                      </a:pPr>
+                      <a:r>
+                        <a:rPr lang="en-US" sz="2500" b="0" i="0" kern="1200" dirty="0" err="1">
+                          <a:solidFill>
+                            <a:schemeClr val="dk1"/>
+                          </a:solidFill>
+                          <a:effectLst/>
+                          <a:latin typeface="+mn-lt"/>
+                          <a:ea typeface="+mn-ea"/>
+                          <a:cs typeface="+mn-cs"/>
+                        </a:rPr>
+                        <a:t>ElectroCookie</a:t>
+                      </a:r>
+                      <a:r>
+                        <a:rPr lang="en-US" sz="2500" b="0" i="0" kern="1200" dirty="0">
+                          <a:solidFill>
+                            <a:schemeClr val="dk1"/>
+                          </a:solidFill>
+                          <a:effectLst/>
+                          <a:latin typeface="+mn-lt"/>
+                          <a:ea typeface="+mn-ea"/>
+                          <a:cs typeface="+mn-cs"/>
+                        </a:rPr>
+                        <a:t> 256GB </a:t>
+                      </a:r>
+                      <a:r>
+                        <a:rPr lang="en-US" sz="2500" b="0" i="0" kern="1200" dirty="0" err="1">
+                          <a:solidFill>
+                            <a:schemeClr val="dk1"/>
+                          </a:solidFill>
+                          <a:effectLst/>
+                          <a:latin typeface="+mn-lt"/>
+                          <a:ea typeface="+mn-ea"/>
+                          <a:cs typeface="+mn-cs"/>
+                        </a:rPr>
+                        <a:t>NVMe</a:t>
+                      </a:r>
+                      <a:r>
+                        <a:rPr lang="en-US" sz="2500" b="0" i="0" kern="1200" dirty="0">
+                          <a:solidFill>
+                            <a:schemeClr val="dk1"/>
+                          </a:solidFill>
+                          <a:effectLst/>
+                          <a:latin typeface="+mn-lt"/>
+                          <a:ea typeface="+mn-ea"/>
+                          <a:cs typeface="+mn-cs"/>
+                        </a:rPr>
+                        <a:t> SSD for Raspberry Pi 5 – SK OEM BC901 (2242 Size, PCIe Gen4 x4)</a:t>
+                      </a:r>
+                    </a:p>
+                  </a:txBody>
+                  <a:tcPr>
+                    <a:lnL w="12700" cap="flat" cmpd="sng" algn="ctr">
+                      <a:solidFill>
+                        <a:schemeClr val="tx1"/>
+                      </a:solidFill>
+                      <a:prstDash val="solid"/>
+                      <a:round/>
+                      <a:headEnd type="none" w="med" len="med"/>
+                      <a:tailEnd type="none" w="med" len="med"/>
+                    </a:lnL>
+                    <a:lnR w="12700" cap="flat" cmpd="sng" algn="ctr">
+                      <a:solidFill>
+                        <a:schemeClr val="tx1"/>
+                      </a:solidFill>
+                      <a:prstDash val="solid"/>
+                      <a:round/>
+                      <a:headEnd type="none" w="med" len="med"/>
+                      <a:tailEnd type="none" w="med" len="med"/>
+                    </a:lnR>
+                    <a:lnT w="12700" cap="flat" cmpd="sng" algn="ctr">
+                      <a:solidFill>
+                        <a:schemeClr val="tx1"/>
+                      </a:solidFill>
+                      <a:prstDash val="solid"/>
+                      <a:round/>
+                      <a:headEnd type="none" w="med" len="med"/>
+                      <a:tailEnd type="none" w="med" len="med"/>
+                    </a:lnT>
+                    <a:lnB w="12700" cap="flat" cmpd="sng" algn="ctr">
+                      <a:solidFill>
+                        <a:schemeClr val="tx1"/>
+                      </a:solidFill>
+                      <a:prstDash val="solid"/>
+                      <a:round/>
+                      <a:headEnd type="none" w="med" len="med"/>
+                      <a:tailEnd type="none" w="med" len="med"/>
+                    </a:lnB>
+                    <a:noFill/>
+                  </a:tcPr>
+                </a:tc>
+                <a:tc>
+                  <a:txBody>
+                    <a:bodyPr/>
+                    <a:lstStyle/>
+                    <a:p>
+                      <a:pPr algn="ctr"/>
+                      <a:r>
+                        <a:rPr lang="en-US" sz="2500" dirty="0">
+                          <a:solidFill>
+                            <a:schemeClr val="tx1"/>
+                          </a:solidFill>
+                        </a:rPr>
+                        <a:t> </a:t>
+                      </a:r>
+                      <a:r>
+                        <a:rPr lang="en-US" sz="2500" b="0" i="0" kern="1200" dirty="0">
+                          <a:solidFill>
+                            <a:schemeClr val="dk1"/>
+                          </a:solidFill>
+                          <a:effectLst/>
+                          <a:latin typeface="+mn-lt"/>
+                          <a:ea typeface="+mn-ea"/>
+                          <a:cs typeface="+mn-cs"/>
+                        </a:rPr>
+                        <a:t>4,399 Yen</a:t>
+                      </a:r>
+                      <a:endParaRPr lang="en-US" sz="2500" dirty="0">
+                        <a:solidFill>
+                          <a:schemeClr val="tx1"/>
+                        </a:solidFill>
+                      </a:endParaRPr>
+                    </a:p>
+                  </a:txBody>
+                  <a:tcPr>
+                    <a:lnL w="12700" cap="flat" cmpd="sng" algn="ctr">
+                      <a:solidFill>
+                        <a:schemeClr val="tx1"/>
+                      </a:solidFill>
+                      <a:prstDash val="solid"/>
+                      <a:round/>
+                      <a:headEnd type="none" w="med" len="med"/>
+                      <a:tailEnd type="none" w="med" len="med"/>
+                    </a:lnL>
+                    <a:lnR w="12700" cap="flat" cmpd="sng" algn="ctr">
+                      <a:solidFill>
+                        <a:schemeClr val="tx1"/>
+                      </a:solidFill>
+                      <a:prstDash val="solid"/>
+                      <a:round/>
+                      <a:headEnd type="none" w="med" len="med"/>
+                      <a:tailEnd type="none" w="med" len="med"/>
+                    </a:lnR>
+                    <a:lnT w="12700" cap="flat" cmpd="sng" algn="ctr">
+                      <a:solidFill>
+                        <a:schemeClr val="tx1"/>
+                      </a:solidFill>
+                      <a:prstDash val="solid"/>
+                      <a:round/>
+                      <a:headEnd type="none" w="med" len="med"/>
+                      <a:tailEnd type="none" w="med" len="med"/>
+                    </a:lnT>
+                    <a:lnB w="12700" cap="flat" cmpd="sng" algn="ctr">
+                      <a:solidFill>
+                        <a:schemeClr val="tx1"/>
+                      </a:solidFill>
+                      <a:prstDash val="solid"/>
+                      <a:round/>
+                      <a:headEnd type="none" w="med" len="med"/>
+                      <a:tailEnd type="none" w="med" len="med"/>
+                    </a:lnB>
+                    <a:noFill/>
+                  </a:tcPr>
+                </a:tc>
+                <a:extLst>
+                  <a:ext uri="{0D108BD9-81ED-4DB2-BD59-A6C34878D82A}">
+                    <a16:rowId xmlns:a16="http://schemas.microsoft.com/office/drawing/2014/main" val="4170106355"/>
+                  </a:ext>
+                </a:extLst>
+              </a:tr>
+              <a:tr h="370840">
+                <a:tc>
+                  <a:txBody>
+                    <a:bodyPr/>
+                    <a:lstStyle/>
+                    <a:p>
+                      <a:pPr marL="0" marR="0" lvl="0" indent="0" algn="ctr" defTabSz="914400" rtl="0" eaLnBrk="1" fontAlgn="auto" latinLnBrk="0" hangingPunct="1">
+                        <a:lnSpc>
+                          <a:spcPct val="100000"/>
+                        </a:lnSpc>
+                        <a:spcBef>
+                          <a:spcPts val="0"/>
+                        </a:spcBef>
+                        <a:spcAft>
+                          <a:spcPts val="0"/>
+                        </a:spcAft>
+                        <a:buClrTx/>
+                        <a:buSzTx/>
+                        <a:buFontTx/>
+                        <a:buNone/>
+                        <a:tabLst/>
+                        <a:defRPr/>
+                      </a:pPr>
+                      <a:r>
+                        <a:rPr lang="en-US" sz="2500" b="0" i="0" kern="1200" dirty="0" err="1">
+                          <a:solidFill>
+                            <a:schemeClr val="dk1"/>
+                          </a:solidFill>
+                          <a:effectLst/>
+                          <a:latin typeface="+mn-lt"/>
+                          <a:ea typeface="+mn-ea"/>
+                          <a:cs typeface="+mn-cs"/>
+                        </a:rPr>
+                        <a:t>Freenove</a:t>
+                      </a:r>
+                      <a:r>
+                        <a:rPr lang="en-US" sz="2500" b="0" i="0" kern="1200" dirty="0">
+                          <a:solidFill>
+                            <a:schemeClr val="dk1"/>
+                          </a:solidFill>
+                          <a:effectLst/>
+                          <a:latin typeface="+mn-lt"/>
+                          <a:ea typeface="+mn-ea"/>
+                          <a:cs typeface="+mn-cs"/>
+                        </a:rPr>
+                        <a:t> 7-inch Touchscreen Monitor for Raspberry Pi 5, 4, B, 3, B+, A+, 800x480 Pixel IPS Display, 5-Point Touch Capacitive Screen, MIPI DSI Port with No Drivers</a:t>
+                      </a:r>
+                    </a:p>
+                  </a:txBody>
+                  <a:tcPr>
+                    <a:lnL w="12700" cap="flat" cmpd="sng" algn="ctr">
+                      <a:solidFill>
+                        <a:schemeClr val="tx1"/>
+                      </a:solidFill>
+                      <a:prstDash val="solid"/>
+                      <a:round/>
+                      <a:headEnd type="none" w="med" len="med"/>
+                      <a:tailEnd type="none" w="med" len="med"/>
+                    </a:lnL>
+                    <a:lnR w="12700" cap="flat" cmpd="sng" algn="ctr">
+                      <a:solidFill>
+                        <a:schemeClr val="tx1"/>
+                      </a:solidFill>
+                      <a:prstDash val="solid"/>
+                      <a:round/>
+                      <a:headEnd type="none" w="med" len="med"/>
+                      <a:tailEnd type="none" w="med" len="med"/>
+                    </a:lnR>
+                    <a:lnT w="12700" cap="flat" cmpd="sng" algn="ctr">
+                      <a:solidFill>
+                        <a:schemeClr val="tx1"/>
+                      </a:solidFill>
+                      <a:prstDash val="solid"/>
+                      <a:round/>
+                      <a:headEnd type="none" w="med" len="med"/>
+                      <a:tailEnd type="none" w="med" len="med"/>
+                    </a:lnT>
+                    <a:lnB w="12700" cap="flat" cmpd="sng" algn="ctr">
+                      <a:solidFill>
+                        <a:schemeClr val="tx1"/>
+                      </a:solidFill>
+                      <a:prstDash val="solid"/>
+                      <a:round/>
+                      <a:headEnd type="none" w="med" len="med"/>
+                      <a:tailEnd type="none" w="med" len="med"/>
+                    </a:lnB>
+                    <a:noFill/>
+                  </a:tcPr>
+                </a:tc>
+                <a:tc>
+                  <a:txBody>
+                    <a:bodyPr/>
+                    <a:lstStyle/>
+                    <a:p>
+                      <a:pPr algn="ctr"/>
+                      <a:r>
+                        <a:rPr lang="en-US" sz="2500" b="0" i="0" kern="1200" dirty="0">
+                          <a:solidFill>
+                            <a:schemeClr val="dk1"/>
+                          </a:solidFill>
+                          <a:effectLst/>
+                          <a:latin typeface="+mn-lt"/>
+                          <a:ea typeface="+mn-ea"/>
+                          <a:cs typeface="+mn-cs"/>
+                        </a:rPr>
+                        <a:t>7,280 Yen</a:t>
+                      </a:r>
+                      <a:endParaRPr lang="en-US" sz="2500" dirty="0">
+                        <a:solidFill>
+                          <a:schemeClr val="tx1"/>
+                        </a:solidFill>
+                      </a:endParaRPr>
+                    </a:p>
+                  </a:txBody>
+                  <a:tcPr>
+                    <a:lnL w="12700" cap="flat" cmpd="sng" algn="ctr">
+                      <a:solidFill>
+                        <a:schemeClr val="tx1"/>
+                      </a:solidFill>
+                      <a:prstDash val="solid"/>
+                      <a:round/>
+                      <a:headEnd type="none" w="med" len="med"/>
+                      <a:tailEnd type="none" w="med" len="med"/>
+                    </a:lnL>
+                    <a:lnR w="12700" cap="flat" cmpd="sng" algn="ctr">
+                      <a:solidFill>
+                        <a:schemeClr val="tx1"/>
+                      </a:solidFill>
+                      <a:prstDash val="solid"/>
+                      <a:round/>
+                      <a:headEnd type="none" w="med" len="med"/>
+                      <a:tailEnd type="none" w="med" len="med"/>
+                    </a:lnR>
+                    <a:lnT w="12700" cap="flat" cmpd="sng" algn="ctr">
+                      <a:solidFill>
+                        <a:schemeClr val="tx1"/>
+                      </a:solidFill>
+                      <a:prstDash val="solid"/>
+                      <a:round/>
+                      <a:headEnd type="none" w="med" len="med"/>
+                      <a:tailEnd type="none" w="med" len="med"/>
+                    </a:lnT>
+                    <a:lnB w="12700" cap="flat" cmpd="sng" algn="ctr">
+                      <a:solidFill>
+                        <a:schemeClr val="tx1"/>
+                      </a:solidFill>
+                      <a:prstDash val="solid"/>
+                      <a:round/>
+                      <a:headEnd type="none" w="med" len="med"/>
+                      <a:tailEnd type="none" w="med" len="med"/>
+                    </a:lnB>
+                    <a:noFill/>
+                  </a:tcPr>
+                </a:tc>
+                <a:extLst>
+                  <a:ext uri="{0D108BD9-81ED-4DB2-BD59-A6C34878D82A}">
+                    <a16:rowId xmlns:a16="http://schemas.microsoft.com/office/drawing/2014/main" val="1464674184"/>
+                  </a:ext>
+                </a:extLst>
+              </a:tr>
+            </a:tbl>
+          </a:graphicData>
+        </a:graphic>
+      </p:graphicFrame>
+    </p:spTree>
+    <p:extLst>
+      <p:ext uri="{BB962C8B-B14F-4D97-AF65-F5344CB8AC3E}">
+        <p14:creationId xmlns:p14="http://schemas.microsoft.com/office/powerpoint/2010/main" val="2044405341"/>
+      </p:ext>
+    </p:extLst>
+  </p:cSld>
+  <p:clrMapOvr>
+    <a:masterClrMapping/>
+  </p:clrMapOvr>
+</p:sld>
+</file>
+
+<file path=ppt/slides/slide7.xml><?xml version="1.0" encoding="utf-8"?>
 <p:sld xmlns:a="http://schemas.openxmlformats.org/drawingml/2006/main" xmlns:r="http://schemas.openxmlformats.org/officeDocument/2006/relationships" xmlns:p="http://schemas.openxmlformats.org/presentationml/2006/main">
   <p:cSld>
     <p:spTree>
